--- a/presentation_v4.pptx
+++ b/presentation_v4.pptx
@@ -3114,8 +3114,8 @@
         </p:nvSpPr>
         <p:spPr>
           <a:xfrm>
-            <a:off x="612140" y="2218175"/>
-            <a:ext cx="10967720" cy="769441"/>
+            <a:off x="1343660" y="2436704"/>
+            <a:ext cx="9903460" cy="769441"/>
           </a:xfrm>
           <a:prstGeom prst="rect">
             <a:avLst/>
@@ -3137,7 +3137,7 @@
             </a:pPr>
             <a:r>
               <a:rPr dirty="0"/>
-              <a:t>🌍 Job Market Intelligence</a:t>
+              <a:t>Job Market Intelligence</a:t>
             </a:r>
             <a:r>
               <a:rPr lang="en-US" dirty="0"/>
@@ -3400,8 +3400,8 @@
         </p:nvSpPr>
         <p:spPr>
           <a:xfrm>
-            <a:off x="1016000" y="1616918"/>
-            <a:ext cx="8940800" cy="4421723"/>
+            <a:off x="1625600" y="2334468"/>
+            <a:ext cx="8280400" cy="2395528"/>
           </a:xfrm>
           <a:prstGeom prst="rect">
             <a:avLst/>
@@ -3448,19 +3448,6 @@
                 </a:solidFill>
               </a:defRPr>
             </a:pPr>
-            <a:endParaRPr dirty="0"/>
-          </a:p>
-          <a:p>
-            <a:pPr>
-              <a:spcAft>
-                <a:spcPts val="1000"/>
-              </a:spcAft>
-              <a:defRPr sz="1800">
-                <a:solidFill>
-                  <a:srgbClr val="F0F0F5"/>
-                </a:solidFill>
-              </a:defRPr>
-            </a:pPr>
             <a:r>
               <a:rPr dirty="0"/>
               <a:t>🔹 Combines real salary data with AI-powered insights</a:t>
@@ -3477,19 +3464,6 @@
                 </a:solidFill>
               </a:defRPr>
             </a:pPr>
-            <a:endParaRPr dirty="0"/>
-          </a:p>
-          <a:p>
-            <a:pPr>
-              <a:spcAft>
-                <a:spcPts val="1000"/>
-              </a:spcAft>
-              <a:defRPr sz="1800">
-                <a:solidFill>
-                  <a:srgbClr val="F0F0F5"/>
-                </a:solidFill>
-              </a:defRPr>
-            </a:pPr>
             <a:r>
               <a:rPr dirty="0"/>
               <a:t>🔹 4 interactive tabs — explore, predict, chat, and search</a:t>
@@ -3506,36 +3480,10 @@
                 </a:solidFill>
               </a:defRPr>
             </a:pPr>
-            <a:endParaRPr dirty="0"/>
-          </a:p>
-          <a:p>
-            <a:pPr>
-              <a:spcAft>
-                <a:spcPts val="1000"/>
-              </a:spcAft>
-              <a:defRPr sz="1800">
-                <a:solidFill>
-                  <a:srgbClr val="F0F0F5"/>
-                </a:solidFill>
-              </a:defRPr>
-            </a:pPr>
             <a:r>
               <a:rPr dirty="0"/>
               <a:t>🔹 Data source: Data Science Job Salaries (Hugging Face → 607 rows)</a:t>
             </a:r>
-          </a:p>
-          <a:p>
-            <a:pPr>
-              <a:spcAft>
-                <a:spcPts val="1000"/>
-              </a:spcAft>
-              <a:defRPr sz="1800">
-                <a:solidFill>
-                  <a:srgbClr val="F0F0F5"/>
-                </a:solidFill>
-              </a:defRPr>
-            </a:pPr>
-            <a:endParaRPr dirty="0"/>
           </a:p>
           <a:p>
             <a:pPr>
@@ -3560,19 +3508,6 @@
               <a:rPr dirty="0"/>
               <a:t> API</a:t>
             </a:r>
-          </a:p>
-          <a:p>
-            <a:pPr>
-              <a:spcAft>
-                <a:spcPts val="1000"/>
-              </a:spcAft>
-              <a:defRPr sz="1800">
-                <a:solidFill>
-                  <a:srgbClr val="F0F0F5"/>
-                </a:solidFill>
-              </a:defRPr>
-            </a:pPr>
-            <a:endParaRPr dirty="0"/>
           </a:p>
           <a:p>
             <a:pPr>
@@ -3765,7 +3700,7 @@
         <p:spPr>
           <a:xfrm>
             <a:off x="1371600" y="1430218"/>
-            <a:ext cx="8648700" cy="5232202"/>
+            <a:ext cx="7702550" cy="5232202"/>
           </a:xfrm>
           <a:prstGeom prst="rect">
             <a:avLst/>
@@ -3789,6 +3724,10 @@
               </a:defRPr>
             </a:pPr>
             <a:r>
+              <a:rPr lang="en-US" dirty="0"/>
+              <a:t>1 - </a:t>
+            </a:r>
+            <a:r>
               <a:rPr dirty="0"/>
               <a:t>Market Explorer</a:t>
             </a:r>
@@ -3850,6 +3789,10 @@
               </a:defRPr>
             </a:pPr>
             <a:r>
+              <a:rPr lang="en-US" dirty="0"/>
+              <a:t>2 - </a:t>
+            </a:r>
+            <a:r>
               <a:rPr dirty="0"/>
               <a:t>Salary Predictor</a:t>
             </a:r>
@@ -3895,6 +3838,10 @@
               </a:defRPr>
             </a:pPr>
             <a:r>
+              <a:rPr lang="en-US" dirty="0"/>
+              <a:t>3 - </a:t>
+            </a:r>
+            <a:r>
               <a:rPr dirty="0"/>
               <a:t>AI Career Coach</a:t>
             </a:r>
@@ -3939,6 +3886,10 @@
                 </a:solidFill>
               </a:defRPr>
             </a:pPr>
+            <a:r>
+              <a:rPr lang="en-US" dirty="0"/>
+              <a:t>4 - </a:t>
+            </a:r>
             <a:r>
               <a:rPr dirty="0"/>
               <a:t>Live Job Finder</a:t>
@@ -5213,8 +5164,8 @@
         </p:nvSpPr>
         <p:spPr>
           <a:xfrm>
-            <a:off x="1238250" y="1037679"/>
-            <a:ext cx="8261350" cy="5637441"/>
+            <a:off x="1352550" y="2174329"/>
+            <a:ext cx="8261350" cy="3206006"/>
           </a:xfrm>
           <a:prstGeom prst="rect">
             <a:avLst/>
@@ -5261,19 +5212,6 @@
                 </a:solidFill>
               </a:defRPr>
             </a:pPr>
-            <a:endParaRPr dirty="0"/>
-          </a:p>
-          <a:p>
-            <a:pPr>
-              <a:spcAft>
-                <a:spcPts val="1000"/>
-              </a:spcAft>
-              <a:defRPr sz="1800">
-                <a:solidFill>
-                  <a:srgbClr val="F0F0F5"/>
-                </a:solidFill>
-              </a:defRPr>
-            </a:pPr>
             <a:r>
               <a:rPr dirty="0"/>
               <a:t>• 6 geographic regions + 1 field category:</a:t>
@@ -5306,19 +5244,6 @@
                 </a:solidFill>
               </a:defRPr>
             </a:pPr>
-            <a:endParaRPr dirty="0"/>
-          </a:p>
-          <a:p>
-            <a:pPr>
-              <a:spcAft>
-                <a:spcPts val="1000"/>
-              </a:spcAft>
-              <a:defRPr sz="1800">
-                <a:solidFill>
-                  <a:srgbClr val="F0F0F5"/>
-                </a:solidFill>
-              </a:defRPr>
-            </a:pPr>
             <a:r>
               <a:rPr dirty="0"/>
               <a:t>• 🛩️ Aerospace — aircraft structural designer, airframe, composites, maintenance</a:t>
@@ -5335,36 +5260,10 @@
                 </a:solidFill>
               </a:defRPr>
             </a:pPr>
-            <a:endParaRPr dirty="0"/>
-          </a:p>
-          <a:p>
-            <a:pPr>
-              <a:spcAft>
-                <a:spcPts val="1000"/>
-              </a:spcAft>
-              <a:defRPr sz="1800">
-                <a:solidFill>
-                  <a:srgbClr val="F0F0F5"/>
-                </a:solidFill>
-              </a:defRPr>
-            </a:pPr>
-            <a:r>
-              <a:rPr dirty="0"/>
-              <a:t>• Two filter dropdowns: 🎯 Field (DS/ML/DL or Aerospace) + 📍 Region</a:t>
-            </a:r>
-          </a:p>
-          <a:p>
-            <a:pPr>
-              <a:spcAft>
-                <a:spcPts val="1000"/>
-              </a:spcAft>
-              <a:defRPr sz="1800">
-                <a:solidFill>
-                  <a:srgbClr val="F0F0F5"/>
-                </a:solidFill>
-              </a:defRPr>
-            </a:pPr>
-            <a:endParaRPr dirty="0"/>
+            <a:r>
+              <a:rPr dirty="0"/>
+              <a:t>• Two filter dropdowns:  Field (DS/ML/DL or Aerospace) + Region</a:t>
+            </a:r>
           </a:p>
           <a:p>
             <a:pPr>
@@ -5393,19 +5292,6 @@
                 </a:solidFill>
               </a:defRPr>
             </a:pPr>
-            <a:endParaRPr dirty="0"/>
-          </a:p>
-          <a:p>
-            <a:pPr>
-              <a:spcAft>
-                <a:spcPts val="1000"/>
-              </a:spcAft>
-              <a:defRPr sz="1800">
-                <a:solidFill>
-                  <a:srgbClr val="F0F0F5"/>
-                </a:solidFill>
-              </a:defRPr>
-            </a:pPr>
             <a:r>
               <a:rPr dirty="0"/>
               <a:t>• Browse results in expandable cards with direct links</a:t>
@@ -5422,22 +5308,9 @@
                 </a:solidFill>
               </a:defRPr>
             </a:pPr>
-            <a:endParaRPr dirty="0"/>
-          </a:p>
-          <a:p>
-            <a:pPr>
-              <a:spcAft>
-                <a:spcPts val="1000"/>
-              </a:spcAft>
-              <a:defRPr sz="1800">
-                <a:solidFill>
-                  <a:srgbClr val="F0F0F5"/>
-                </a:solidFill>
-              </a:defRPr>
-            </a:pPr>
-            <a:r>
-              <a:rPr dirty="0"/>
-              <a:t>• 📥 Export all jobs as CSV</a:t>
+            <a:r>
+              <a:rPr dirty="0"/>
+              <a:t>• Export all jobs as CSV</a:t>
             </a:r>
           </a:p>
         </p:txBody>
@@ -5450,7 +5323,7 @@
         </p:nvSpPr>
         <p:spPr>
           <a:xfrm>
-            <a:off x="914400" y="6309360"/>
+            <a:off x="929640" y="6309360"/>
             <a:ext cx="10332720" cy="365760"/>
           </a:xfrm>
           <a:prstGeom prst="rect">
@@ -5472,7 +5345,16 @@
               </a:defRPr>
             </a:pPr>
             <a:r>
-              <a:t>Job Market Intelligence  |  Ironhack Final Project</a:t>
+              <a:rPr dirty="0"/>
+              <a:t>Job Market Intelligence  |  </a:t>
+            </a:r>
+            <a:r>
+              <a:rPr dirty="0" err="1"/>
+              <a:t>Ironhack</a:t>
+            </a:r>
+            <a:r>
+              <a:rPr dirty="0"/>
+              <a:t> Final Project</a:t>
             </a:r>
           </a:p>
         </p:txBody>
@@ -5598,8 +5480,8 @@
         </p:nvSpPr>
         <p:spPr>
           <a:xfrm>
-            <a:off x="1130300" y="1371600"/>
-            <a:ext cx="7810500" cy="5232202"/>
+            <a:off x="1352550" y="2020462"/>
+            <a:ext cx="7810500" cy="3206006"/>
           </a:xfrm>
           <a:prstGeom prst="rect">
             <a:avLst/>
@@ -5643,19 +5525,6 @@
                 </a:solidFill>
               </a:defRPr>
             </a:pPr>
-            <a:endParaRPr dirty="0"/>
-          </a:p>
-          <a:p>
-            <a:pPr>
-              <a:spcAft>
-                <a:spcPts val="1000"/>
-              </a:spcAft>
-              <a:defRPr sz="1800">
-                <a:solidFill>
-                  <a:srgbClr val="F0F0F5"/>
-                </a:solidFill>
-              </a:defRPr>
-            </a:pPr>
             <a:r>
               <a:rPr dirty="0"/>
               <a:t>Machine Learning  Scikit-learn (Linear, Random Forest), </a:t>
@@ -5685,19 +5554,6 @@
                 </a:solidFill>
               </a:defRPr>
             </a:pPr>
-            <a:endParaRPr dirty="0"/>
-          </a:p>
-          <a:p>
-            <a:pPr>
-              <a:spcAft>
-                <a:spcPts val="1000"/>
-              </a:spcAft>
-              <a:defRPr sz="1800">
-                <a:solidFill>
-                  <a:srgbClr val="F0F0F5"/>
-                </a:solidFill>
-              </a:defRPr>
-            </a:pPr>
             <a:r>
               <a:rPr dirty="0"/>
               <a:t>Gen AI / RAG      DeepSeek (OpenAI-compatible), </a:t>
@@ -5751,19 +5607,6 @@
                 </a:solidFill>
               </a:defRPr>
             </a:pPr>
-            <a:endParaRPr dirty="0"/>
-          </a:p>
-          <a:p>
-            <a:pPr>
-              <a:spcAft>
-                <a:spcPts val="1000"/>
-              </a:spcAft>
-              <a:defRPr sz="1800">
-                <a:solidFill>
-                  <a:srgbClr val="F0F0F5"/>
-                </a:solidFill>
-              </a:defRPr>
-            </a:pPr>
             <a:r>
               <a:rPr dirty="0"/>
               <a:t>App               </a:t>
@@ -5796,19 +5639,6 @@
                 </a:solidFill>
               </a:defRPr>
             </a:pPr>
-            <a:endParaRPr dirty="0"/>
-          </a:p>
-          <a:p>
-            <a:pPr>
-              <a:spcAft>
-                <a:spcPts val="1000"/>
-              </a:spcAft>
-              <a:defRPr sz="1800">
-                <a:solidFill>
-                  <a:srgbClr val="F0F0F5"/>
-                </a:solidFill>
-              </a:defRPr>
-            </a:pPr>
             <a:r>
               <a:rPr dirty="0"/>
               <a:t>Live Search       </a:t>
@@ -5821,19 +5651,6 @@
               <a:rPr dirty="0"/>
               <a:t> API — 7 regions, real-time web scraping</a:t>
             </a:r>
-          </a:p>
-          <a:p>
-            <a:pPr>
-              <a:spcAft>
-                <a:spcPts val="1000"/>
-              </a:spcAft>
-              <a:defRPr sz="1800">
-                <a:solidFill>
-                  <a:srgbClr val="F0F0F5"/>
-                </a:solidFill>
-              </a:defRPr>
-            </a:pPr>
-            <a:endParaRPr dirty="0"/>
           </a:p>
           <a:p>
             <a:pPr>
@@ -5945,8 +5762,8 @@
         </p:nvSpPr>
         <p:spPr>
           <a:xfrm>
-            <a:off x="914400" y="2286000"/>
-            <a:ext cx="3327400" cy="769441"/>
+            <a:off x="171450" y="2797602"/>
+            <a:ext cx="2768600" cy="2246769"/>
           </a:xfrm>
           <a:prstGeom prst="rect">
             <a:avLst/>
@@ -5959,7 +5776,7 @@
           </a:bodyPr>
           <a:lstStyle/>
           <a:p>
-            <a:pPr>
+            <a:pPr algn="ctr">
               <a:defRPr sz="4400" b="1">
                 <a:solidFill>
                   <a:srgbClr val="FFFFFF"/>
@@ -5970,79 +5787,23 @@
               <a:rPr dirty="0"/>
               <a:t>Live Demo</a:t>
             </a:r>
-          </a:p>
-        </p:txBody>
-      </p:sp>
-      <p:sp>
-        <p:nvSpPr>
-          <p:cNvPr id="3" name="TextBox 2"/>
-          <p:cNvSpPr txBox="1"/>
-          <p:nvPr/>
-        </p:nvSpPr>
-        <p:spPr>
-          <a:xfrm>
-            <a:off x="914400" y="3200400"/>
-            <a:ext cx="10332720" cy="731520"/>
-          </a:xfrm>
-          <a:prstGeom prst="rect">
-            <a:avLst/>
-          </a:prstGeom>
-          <a:noFill/>
-        </p:spPr>
-        <p:txBody>
-          <a:bodyPr wrap="square">
-            <a:spAutoFit/>
-          </a:bodyPr>
-          <a:lstStyle/>
-          <a:p>
-            <a:pPr>
-              <a:defRPr sz="2400">
-                <a:solidFill>
-                  <a:srgbClr val="0096D6"/>
-                </a:solidFill>
-              </a:defRPr>
-            </a:pPr>
-            <a:r>
-              <a:t>streamlit run app/streamlit_app.py</a:t>
-            </a:r>
-          </a:p>
-        </p:txBody>
-      </p:sp>
-      <p:sp>
-        <p:nvSpPr>
-          <p:cNvPr id="4" name="TextBox 3"/>
-          <p:cNvSpPr txBox="1"/>
-          <p:nvPr/>
-        </p:nvSpPr>
-        <p:spPr>
-          <a:xfrm>
-            <a:off x="1371600" y="3840480"/>
-            <a:ext cx="6591300" cy="369332"/>
-          </a:xfrm>
-          <a:prstGeom prst="rect">
-            <a:avLst/>
-          </a:prstGeom>
-          <a:noFill/>
-        </p:spPr>
-        <p:txBody>
-          <a:bodyPr wrap="square">
-            <a:spAutoFit/>
-          </a:bodyPr>
-          <a:lstStyle/>
-          <a:p>
-            <a:pPr>
-              <a:spcAft>
-                <a:spcPts val="1000"/>
-              </a:spcAft>
-              <a:defRPr sz="1800">
-                <a:solidFill>
-                  <a:srgbClr val="888899"/>
-                </a:solidFill>
-              </a:defRPr>
-            </a:pPr>
-            <a:r>
-              <a:t>github.com/windows2t2/project-ds-ml-end</a:t>
-            </a:r>
+            <a:endParaRPr lang="en-US" dirty="0"/>
+          </a:p>
+          <a:p>
+            <a:pPr algn="ctr">
+              <a:defRPr sz="4400" b="1">
+                <a:solidFill>
+                  <a:srgbClr val="FFFFFF"/>
+                </a:solidFill>
+              </a:defRPr>
+            </a:pPr>
+            <a:r>
+              <a:rPr lang="en-US" sz="9600" dirty="0">
+                <a:sym typeface="Wingdings" panose="05000000000000000000" pitchFamily="2" charset="2"/>
+              </a:rPr>
+              <a:t></a:t>
+            </a:r>
+            <a:endParaRPr sz="9600" dirty="0"/>
           </a:p>
         </p:txBody>
       </p:sp>
@@ -6079,6 +5840,36 @@
           </a:p>
         </p:txBody>
       </p:sp>
+      <p:pic>
+        <p:nvPicPr>
+          <p:cNvPr id="7" name="Picture 6">
+            <a:extLst>
+              <a:ext uri="{FF2B5EF4-FFF2-40B4-BE49-F238E27FC236}">
+                <a16:creationId xmlns:a16="http://schemas.microsoft.com/office/drawing/2014/main" id="{016797C3-4910-0A12-8C21-00191D9695F7}"/>
+              </a:ext>
+            </a:extLst>
+          </p:cNvPr>
+          <p:cNvPicPr>
+            <a:picLocks noChangeAspect="1"/>
+          </p:cNvPicPr>
+          <p:nvPr/>
+        </p:nvPicPr>
+        <p:blipFill>
+          <a:blip r:embed="rId2"/>
+          <a:stretch>
+            <a:fillRect/>
+          </a:stretch>
+        </p:blipFill>
+        <p:spPr>
+          <a:xfrm>
+            <a:off x="3048000" y="0"/>
+            <a:ext cx="9144000" cy="6858000"/>
+          </a:xfrm>
+          <a:prstGeom prst="rect">
+            <a:avLst/>
+          </a:prstGeom>
+        </p:spPr>
+      </p:pic>
     </p:spTree>
   </p:cSld>
   <p:clrMapOvr>
